--- a/cs701/slides/week-10.pptx
+++ b/cs701/slides/week-10.pptx
@@ -6313,7 +6313,7 @@
                   <a:srgbClr val="01AEFD"/>
                 </a:solidFill>
               </a:rPr>
-              <a:t>Type this into MultiplicationTableGenerator.java   -   line 1</a:t>
+              <a:t>Make a new file, MultiplicationTableGenerator.java, and type this in   -   line 1</a:t>
             </a:r>
           </a:p>
         </p:txBody>
@@ -6559,7 +6559,7 @@
                   <a:srgbClr val="DCECEF"/>
                 </a:solidFill>
               </a:rPr>
-              <a:t>Opens the class. Its name must be the file's name without .java - MultiplicationTableGenerator lives in MultiplicationTableGenerator.java - and every other line goes inside its braces.</a:t>
+              <a:t>Opens the class: MultiplicationTableGenerator, the file's name without .java.</a:t>
             </a:r>
           </a:p>
         </p:txBody>
@@ -11903,7 +11903,7 @@
                   <a:srgbClr val="01AEFD"/>
                 </a:solidFill>
               </a:rPr>
-              <a:t>Type this into NestedLoop.java   -   line 1</a:t>
+              <a:t>Make a new file, NestedLoop.java, and type this in   -   line 1</a:t>
             </a:r>
           </a:p>
         </p:txBody>
@@ -11984,7 +11984,7 @@
                   <a:srgbClr val="DCECEF"/>
                 </a:solidFill>
               </a:rPr>
-              <a:t>Opens the class. Its name must be the file's name without .java - NestedLoop lives in NestedLoop.java - and every other line goes inside its braces.</a:t>
+              <a:t>Opens the class: NestedLoop, the file's name without .java.</a:t>
             </a:r>
           </a:p>
         </p:txBody>
@@ -13653,7 +13653,7 @@
                   <a:srgbClr val="01AEFD"/>
                 </a:solidFill>
               </a:rPr>
-              <a:t>Type this into Matrix.java   -   line 1</a:t>
+              <a:t>Make a new file, Matrix.java, and type this in   -   line 1</a:t>
             </a:r>
           </a:p>
         </p:txBody>
@@ -13734,7 +13734,7 @@
                   <a:srgbClr val="DCECEF"/>
                 </a:solidFill>
               </a:rPr>
-              <a:t>Opens the class. Its name must be the file's name without .java - Matrix lives in Matrix.java - and every other line goes inside its braces.</a:t>
+              <a:t>Opens the class: Matrix, the file's name without .java.</a:t>
             </a:r>
           </a:p>
         </p:txBody>
